--- a/99ref/버티카_국내레퍼런스.pptx
+++ b/99ref/버티카_국내레퍼런스.pptx
@@ -206,7 +206,7 @@
           <a:p>
             <a:fld id="{A640A901-53E6-41C4-9EEA-8BEE09C37D41}" type="datetimeFigureOut">
               <a:rPr lang="ko-KR" altLang="en-US" smtClean="0"/>
-              <a:t>2025-09-16</a:t>
+              <a:t>2026-04-27</a:t>
             </a:fld>
             <a:endParaRPr lang="ko-KR" altLang="en-US"/>
           </a:p>
@@ -371,7 +371,7 @@
           <a:p>
             <a:fld id="{14B429C4-6C66-4BB2-903E-0003D83D0C80}" type="datetimeFigureOut">
               <a:rPr lang="ko-KR" altLang="en-US" smtClean="0"/>
-              <a:t>2025-09-16</a:t>
+              <a:t>2026-04-27</a:t>
             </a:fld>
             <a:endParaRPr lang="ko-KR" altLang="en-US"/>
           </a:p>
@@ -1279,7 +1279,7 @@
           <a:p>
             <a:fld id="{5A08F6DC-6B17-467A-8F5F-542C658D840B}" type="datetime1">
               <a:rPr lang="ko-KR" altLang="en-US" smtClean="0"/>
-              <a:t>2025-09-16</a:t>
+              <a:t>2026-04-27</a:t>
             </a:fld>
             <a:endParaRPr lang="ko-KR" altLang="en-US"/>
           </a:p>
@@ -1898,28 +1898,28 @@
                 <a:gridCol w="1616546">
                   <a:extLst>
                     <a:ext uri="{9D8B030D-6E8A-4147-A177-3AD203B41FA5}">
-                      <a16:colId xmlns:a16="http://schemas.microsoft.com/office/drawing/2014/main" val="20000"/>
+                      <a16:colId xmlns:a16="http://schemas.microsoft.com/office/drawing/2014/main" xmlns="" val="20000"/>
                     </a:ext>
                   </a:extLst>
                 </a:gridCol>
                 <a:gridCol w="2908329">
                   <a:extLst>
                     <a:ext uri="{9D8B030D-6E8A-4147-A177-3AD203B41FA5}">
-                      <a16:colId xmlns:a16="http://schemas.microsoft.com/office/drawing/2014/main" val="20001"/>
+                      <a16:colId xmlns:a16="http://schemas.microsoft.com/office/drawing/2014/main" xmlns="" val="20001"/>
                     </a:ext>
                   </a:extLst>
                 </a:gridCol>
                 <a:gridCol w="980573">
                   <a:extLst>
                     <a:ext uri="{9D8B030D-6E8A-4147-A177-3AD203B41FA5}">
-                      <a16:colId xmlns:a16="http://schemas.microsoft.com/office/drawing/2014/main" val="20002"/>
+                      <a16:colId xmlns:a16="http://schemas.microsoft.com/office/drawing/2014/main" xmlns="" val="20002"/>
                     </a:ext>
                   </a:extLst>
                 </a:gridCol>
                 <a:gridCol w="2578956">
                   <a:extLst>
                     <a:ext uri="{9D8B030D-6E8A-4147-A177-3AD203B41FA5}">
-                      <a16:colId xmlns:a16="http://schemas.microsoft.com/office/drawing/2014/main" val="20003"/>
+                      <a16:colId xmlns:a16="http://schemas.microsoft.com/office/drawing/2014/main" xmlns="" val="20003"/>
                     </a:ext>
                   </a:extLst>
                 </a:gridCol>
@@ -2141,7 +2141,7 @@
                 </a:tc>
                 <a:extLst>
                   <a:ext uri="{0D108BD9-81ED-4DB2-BD59-A6C34878D82A}">
-                    <a16:rowId xmlns:a16="http://schemas.microsoft.com/office/drawing/2014/main" val="10000"/>
+                    <a16:rowId xmlns:a16="http://schemas.microsoft.com/office/drawing/2014/main" xmlns="" val="10000"/>
                   </a:ext>
                 </a:extLst>
               </a:tr>
@@ -2771,7 +2771,7 @@
                 </a:tc>
                 <a:extLst>
                   <a:ext uri="{0D108BD9-81ED-4DB2-BD59-A6C34878D82A}">
-                    <a16:rowId xmlns:a16="http://schemas.microsoft.com/office/drawing/2014/main" val="10001"/>
+                    <a16:rowId xmlns:a16="http://schemas.microsoft.com/office/drawing/2014/main" xmlns="" val="10001"/>
                   </a:ext>
                 </a:extLst>
               </a:tr>
@@ -3252,7 +3252,7 @@
                 </a:tc>
                 <a:extLst>
                   <a:ext uri="{0D108BD9-81ED-4DB2-BD59-A6C34878D82A}">
-                    <a16:rowId xmlns:a16="http://schemas.microsoft.com/office/drawing/2014/main" val="10002"/>
+                    <a16:rowId xmlns:a16="http://schemas.microsoft.com/office/drawing/2014/main" xmlns="" val="10002"/>
                   </a:ext>
                 </a:extLst>
               </a:tr>
@@ -3585,7 +3585,7 @@
                 </a:tc>
                 <a:extLst>
                   <a:ext uri="{0D108BD9-81ED-4DB2-BD59-A6C34878D82A}">
-                    <a16:rowId xmlns:a16="http://schemas.microsoft.com/office/drawing/2014/main" val="10003"/>
+                    <a16:rowId xmlns:a16="http://schemas.microsoft.com/office/drawing/2014/main" xmlns="" val="10003"/>
                   </a:ext>
                 </a:extLst>
               </a:tr>
@@ -3949,7 +3949,7 @@
                 </a:tc>
                 <a:extLst>
                   <a:ext uri="{0D108BD9-81ED-4DB2-BD59-A6C34878D82A}">
-                    <a16:rowId xmlns:a16="http://schemas.microsoft.com/office/drawing/2014/main" val="10004"/>
+                    <a16:rowId xmlns:a16="http://schemas.microsoft.com/office/drawing/2014/main" xmlns="" val="10004"/>
                   </a:ext>
                 </a:extLst>
               </a:tr>
@@ -4402,7 +4402,7 @@
                 </a:tc>
                 <a:extLst>
                   <a:ext uri="{0D108BD9-81ED-4DB2-BD59-A6C34878D82A}">
-                    <a16:rowId xmlns:a16="http://schemas.microsoft.com/office/drawing/2014/main" val="10005"/>
+                    <a16:rowId xmlns:a16="http://schemas.microsoft.com/office/drawing/2014/main" xmlns="" val="10005"/>
                   </a:ext>
                 </a:extLst>
               </a:tr>
@@ -4769,7 +4769,7 @@
                 </a:tc>
                 <a:extLst>
                   <a:ext uri="{0D108BD9-81ED-4DB2-BD59-A6C34878D82A}">
-                    <a16:rowId xmlns:a16="http://schemas.microsoft.com/office/drawing/2014/main" val="10006"/>
+                    <a16:rowId xmlns:a16="http://schemas.microsoft.com/office/drawing/2014/main" xmlns="" val="10006"/>
                   </a:ext>
                 </a:extLst>
               </a:tr>
@@ -5174,7 +5174,7 @@
                 </a:tc>
                 <a:extLst>
                   <a:ext uri="{0D108BD9-81ED-4DB2-BD59-A6C34878D82A}">
-                    <a16:rowId xmlns:a16="http://schemas.microsoft.com/office/drawing/2014/main" val="1757568263"/>
+                    <a16:rowId xmlns:a16="http://schemas.microsoft.com/office/drawing/2014/main" xmlns="" val="1757568263"/>
                   </a:ext>
                 </a:extLst>
               </a:tr>
@@ -5187,7 +5187,7 @@
           <p:cNvPr id="70" name="그림 69">
             <a:extLst>
               <a:ext uri="{FF2B5EF4-FFF2-40B4-BE49-F238E27FC236}">
-                <a16:creationId xmlns:a16="http://schemas.microsoft.com/office/drawing/2014/main" id="{39E8787F-53D8-4DC8-AA4B-9086EEE110D1}"/>
+                <a16:creationId xmlns:a16="http://schemas.microsoft.com/office/drawing/2014/main" xmlns="" id="{39E8787F-53D8-4DC8-AA4B-9086EEE110D1}"/>
               </a:ext>
             </a:extLst>
           </p:cNvPr>
@@ -5204,7 +5204,7 @@
         </p:blipFill>
         <p:spPr>
           <a:xfrm>
-            <a:off x="9241904" y="4216214"/>
+            <a:off x="10098114" y="3459756"/>
             <a:ext cx="1930921" cy="577286"/>
           </a:xfrm>
           <a:prstGeom prst="rect">
@@ -5217,7 +5217,7 @@
           <p:cNvPr id="87" name="Picture 2">
             <a:extLst>
               <a:ext uri="{FF2B5EF4-FFF2-40B4-BE49-F238E27FC236}">
-                <a16:creationId xmlns:a16="http://schemas.microsoft.com/office/drawing/2014/main" id="{E1D6FAB2-6CA7-4E1A-9D7B-FA7D270A7A7D}"/>
+                <a16:creationId xmlns:a16="http://schemas.microsoft.com/office/drawing/2014/main" xmlns="" id="{E1D6FAB2-6CA7-4E1A-9D7B-FA7D270A7A7D}"/>
               </a:ext>
             </a:extLst>
           </p:cNvPr>
@@ -5241,7 +5241,7 @@
         </p:blipFill>
         <p:spPr bwMode="auto">
           <a:xfrm>
-            <a:off x="9371104" y="3532660"/>
+            <a:off x="9412668" y="3025584"/>
             <a:ext cx="1900482" cy="394291"/>
           </a:xfrm>
           <a:prstGeom prst="rect">
@@ -5264,7 +5264,7 @@
           <p:cNvPr id="89" name="그림 88">
             <a:extLst>
               <a:ext uri="{FF2B5EF4-FFF2-40B4-BE49-F238E27FC236}">
-                <a16:creationId xmlns:a16="http://schemas.microsoft.com/office/drawing/2014/main" id="{674FFF98-1418-4BED-BA58-9227A8A41BD7}"/>
+                <a16:creationId xmlns:a16="http://schemas.microsoft.com/office/drawing/2014/main" xmlns="" id="{674FFF98-1418-4BED-BA58-9227A8A41BD7}"/>
               </a:ext>
             </a:extLst>
           </p:cNvPr>
@@ -5281,7 +5281,7 @@
         </p:blipFill>
         <p:spPr>
           <a:xfrm>
-            <a:off x="9371104" y="2049258"/>
+            <a:off x="9312915" y="1924567"/>
             <a:ext cx="1837530" cy="531517"/>
           </a:xfrm>
           <a:prstGeom prst="rect">
@@ -5322,7 +5322,7 @@
         </p:blipFill>
         <p:spPr bwMode="auto">
           <a:xfrm>
-            <a:off x="9576296" y="2572530"/>
+            <a:off x="10507322" y="2215083"/>
             <a:ext cx="1592774" cy="836829"/>
           </a:xfrm>
           <a:prstGeom prst="rect">
@@ -5345,7 +5345,7 @@
           <p:cNvPr id="91" name="그림 90">
             <a:extLst>
               <a:ext uri="{FF2B5EF4-FFF2-40B4-BE49-F238E27FC236}">
-                <a16:creationId xmlns:a16="http://schemas.microsoft.com/office/drawing/2014/main" id="{8480CA0B-6F4D-4BFB-8F68-61E78545FDF5}"/>
+                <a16:creationId xmlns:a16="http://schemas.microsoft.com/office/drawing/2014/main" xmlns="" id="{8480CA0B-6F4D-4BFB-8F68-61E78545FDF5}"/>
               </a:ext>
             </a:extLst>
           </p:cNvPr>
@@ -5362,7 +5362,7 @@
         </p:blipFill>
         <p:spPr>
           <a:xfrm>
-            <a:off x="9426874" y="4891238"/>
+            <a:off x="9327122" y="3968525"/>
             <a:ext cx="1645874" cy="486282"/>
           </a:xfrm>
           <a:prstGeom prst="rect">
@@ -5402,7 +5402,7 @@
         </p:blipFill>
         <p:spPr>
           <a:xfrm>
-            <a:off x="9241593" y="5419322"/>
+            <a:off x="10175564" y="4280478"/>
             <a:ext cx="2016436" cy="664238"/>
           </a:xfrm>
           <a:prstGeom prst="rect">
@@ -5451,7 +5451,7 @@
           <p:cNvPr id="5" name="그림 4">
             <a:extLst>
               <a:ext uri="{FF2B5EF4-FFF2-40B4-BE49-F238E27FC236}">
-                <a16:creationId xmlns:a16="http://schemas.microsoft.com/office/drawing/2014/main" id="{679A1E04-F04B-D5E7-88EB-DECF86E8B13D}"/>
+                <a16:creationId xmlns:a16="http://schemas.microsoft.com/office/drawing/2014/main" xmlns="" id="{679A1E04-F04B-D5E7-88EB-DECF86E8B13D}"/>
               </a:ext>
             </a:extLst>
           </p:cNvPr>
@@ -5468,8 +5468,8 @@
         </p:blipFill>
         <p:spPr>
           <a:xfrm>
-            <a:off x="10679304" y="6008664"/>
-            <a:ext cx="1157449" cy="233395"/>
+            <a:off x="9407458" y="4811631"/>
+            <a:ext cx="1656105" cy="333947"/>
           </a:xfrm>
           <a:prstGeom prst="rect">
             <a:avLst/>
@@ -5566,28 +5566,28 @@
                 <a:gridCol w="2044364">
                   <a:extLst>
                     <a:ext uri="{9D8B030D-6E8A-4147-A177-3AD203B41FA5}">
-                      <a16:colId xmlns:a16="http://schemas.microsoft.com/office/drawing/2014/main" val="20000"/>
+                      <a16:colId xmlns:a16="http://schemas.microsoft.com/office/drawing/2014/main" xmlns="" val="20000"/>
                     </a:ext>
                   </a:extLst>
                 </a:gridCol>
                 <a:gridCol w="2181225">
                   <a:extLst>
                     <a:ext uri="{9D8B030D-6E8A-4147-A177-3AD203B41FA5}">
-                      <a16:colId xmlns:a16="http://schemas.microsoft.com/office/drawing/2014/main" val="20001"/>
+                      <a16:colId xmlns:a16="http://schemas.microsoft.com/office/drawing/2014/main" xmlns="" val="20001"/>
                     </a:ext>
                   </a:extLst>
                 </a:gridCol>
                 <a:gridCol w="1021180">
                   <a:extLst>
                     <a:ext uri="{9D8B030D-6E8A-4147-A177-3AD203B41FA5}">
-                      <a16:colId xmlns:a16="http://schemas.microsoft.com/office/drawing/2014/main" val="20002"/>
+                      <a16:colId xmlns:a16="http://schemas.microsoft.com/office/drawing/2014/main" xmlns="" val="20002"/>
                     </a:ext>
                   </a:extLst>
                 </a:gridCol>
                 <a:gridCol w="2881231">
                   <a:extLst>
                     <a:ext uri="{9D8B030D-6E8A-4147-A177-3AD203B41FA5}">
-                      <a16:colId xmlns:a16="http://schemas.microsoft.com/office/drawing/2014/main" val="20003"/>
+                      <a16:colId xmlns:a16="http://schemas.microsoft.com/office/drawing/2014/main" xmlns="" val="20003"/>
                     </a:ext>
                   </a:extLst>
                 </a:gridCol>
@@ -5809,7 +5809,7 @@
                 </a:tc>
                 <a:extLst>
                   <a:ext uri="{0D108BD9-81ED-4DB2-BD59-A6C34878D82A}">
-                    <a16:rowId xmlns:a16="http://schemas.microsoft.com/office/drawing/2014/main" val="10000"/>
+                    <a16:rowId xmlns:a16="http://schemas.microsoft.com/office/drawing/2014/main" xmlns="" val="10000"/>
                   </a:ext>
                 </a:extLst>
               </a:tr>
@@ -6252,7 +6252,7 @@
                 </a:tc>
                 <a:extLst>
                   <a:ext uri="{0D108BD9-81ED-4DB2-BD59-A6C34878D82A}">
-                    <a16:rowId xmlns:a16="http://schemas.microsoft.com/office/drawing/2014/main" val="10001"/>
+                    <a16:rowId xmlns:a16="http://schemas.microsoft.com/office/drawing/2014/main" xmlns="" val="10001"/>
                   </a:ext>
                 </a:extLst>
               </a:tr>
@@ -6779,7 +6779,7 @@
                 </a:tc>
                 <a:extLst>
                   <a:ext uri="{0D108BD9-81ED-4DB2-BD59-A6C34878D82A}">
-                    <a16:rowId xmlns:a16="http://schemas.microsoft.com/office/drawing/2014/main" val="10002"/>
+                    <a16:rowId xmlns:a16="http://schemas.microsoft.com/office/drawing/2014/main" xmlns="" val="10002"/>
                   </a:ext>
                 </a:extLst>
               </a:tr>
@@ -7154,7 +7154,7 @@
                 </a:tc>
                 <a:extLst>
                   <a:ext uri="{0D108BD9-81ED-4DB2-BD59-A6C34878D82A}">
-                    <a16:rowId xmlns:a16="http://schemas.microsoft.com/office/drawing/2014/main" val="10004"/>
+                    <a16:rowId xmlns:a16="http://schemas.microsoft.com/office/drawing/2014/main" xmlns="" val="10004"/>
                   </a:ext>
                 </a:extLst>
               </a:tr>
@@ -7705,7 +7705,7 @@
                 </a:tc>
                 <a:extLst>
                   <a:ext uri="{0D108BD9-81ED-4DB2-BD59-A6C34878D82A}">
-                    <a16:rowId xmlns:a16="http://schemas.microsoft.com/office/drawing/2014/main" val="10007"/>
+                    <a16:rowId xmlns:a16="http://schemas.microsoft.com/office/drawing/2014/main" xmlns="" val="10007"/>
                   </a:ext>
                 </a:extLst>
               </a:tr>
@@ -8068,7 +8068,7 @@
                 </a:tc>
                 <a:extLst>
                   <a:ext uri="{0D108BD9-81ED-4DB2-BD59-A6C34878D82A}">
-                    <a16:rowId xmlns:a16="http://schemas.microsoft.com/office/drawing/2014/main" val="10008"/>
+                    <a16:rowId xmlns:a16="http://schemas.microsoft.com/office/drawing/2014/main" xmlns="" val="10008"/>
                   </a:ext>
                 </a:extLst>
               </a:tr>
@@ -8523,7 +8523,7 @@
                 </a:tc>
                 <a:extLst>
                   <a:ext uri="{0D108BD9-81ED-4DB2-BD59-A6C34878D82A}">
-                    <a16:rowId xmlns:a16="http://schemas.microsoft.com/office/drawing/2014/main" val="10009"/>
+                    <a16:rowId xmlns:a16="http://schemas.microsoft.com/office/drawing/2014/main" xmlns="" val="10009"/>
                   </a:ext>
                 </a:extLst>
               </a:tr>
@@ -8946,7 +8946,7 @@
                 </a:tc>
                 <a:extLst>
                   <a:ext uri="{0D108BD9-81ED-4DB2-BD59-A6C34878D82A}">
-                    <a16:rowId xmlns:a16="http://schemas.microsoft.com/office/drawing/2014/main" val="10012"/>
+                    <a16:rowId xmlns:a16="http://schemas.microsoft.com/office/drawing/2014/main" xmlns="" val="10012"/>
                   </a:ext>
                 </a:extLst>
               </a:tr>
@@ -9310,7 +9310,7 @@
                 </a:tc>
                 <a:extLst>
                   <a:ext uri="{0D108BD9-81ED-4DB2-BD59-A6C34878D82A}">
-                    <a16:rowId xmlns:a16="http://schemas.microsoft.com/office/drawing/2014/main" val="10013"/>
+                    <a16:rowId xmlns:a16="http://schemas.microsoft.com/office/drawing/2014/main" xmlns="" val="10013"/>
                   </a:ext>
                 </a:extLst>
               </a:tr>
@@ -9719,7 +9719,7 @@
                 </a:tc>
                 <a:extLst>
                   <a:ext uri="{0D108BD9-81ED-4DB2-BD59-A6C34878D82A}">
-                    <a16:rowId xmlns:a16="http://schemas.microsoft.com/office/drawing/2014/main" val="1174830984"/>
+                    <a16:rowId xmlns:a16="http://schemas.microsoft.com/office/drawing/2014/main" xmlns="" val="1174830984"/>
                   </a:ext>
                 </a:extLst>
               </a:tr>
@@ -10041,7 +10041,7 @@
                 </a:tc>
                 <a:extLst>
                   <a:ext uri="{0D108BD9-81ED-4DB2-BD59-A6C34878D82A}">
-                    <a16:rowId xmlns:a16="http://schemas.microsoft.com/office/drawing/2014/main" val="3254849268"/>
+                    <a16:rowId xmlns:a16="http://schemas.microsoft.com/office/drawing/2014/main" xmlns="" val="3254849268"/>
                   </a:ext>
                 </a:extLst>
               </a:tr>
@@ -10378,7 +10378,7 @@
                 </a:tc>
                 <a:extLst>
                   <a:ext uri="{0D108BD9-81ED-4DB2-BD59-A6C34878D82A}">
-                    <a16:rowId xmlns:a16="http://schemas.microsoft.com/office/drawing/2014/main" val="3891974251"/>
+                    <a16:rowId xmlns:a16="http://schemas.microsoft.com/office/drawing/2014/main" xmlns="" val="3891974251"/>
                   </a:ext>
                 </a:extLst>
               </a:tr>
@@ -10409,8 +10409,8 @@
         </p:blipFill>
         <p:spPr bwMode="auto">
           <a:xfrm>
-            <a:off x="9498884" y="4809763"/>
-            <a:ext cx="819347" cy="579727"/>
+            <a:off x="10590416" y="4128119"/>
+            <a:ext cx="891596" cy="630847"/>
           </a:xfrm>
           <a:prstGeom prst="rect">
             <a:avLst/>
@@ -10432,7 +10432,7 @@
           <p:cNvPr id="12" name="그림 11">
             <a:extLst>
               <a:ext uri="{FF2B5EF4-FFF2-40B4-BE49-F238E27FC236}">
-                <a16:creationId xmlns:a16="http://schemas.microsoft.com/office/drawing/2014/main" id="{567C6C7C-BEFB-475F-952B-7402E9223C6A}"/>
+                <a16:creationId xmlns:a16="http://schemas.microsoft.com/office/drawing/2014/main" xmlns="" id="{567C6C7C-BEFB-475F-952B-7402E9223C6A}"/>
               </a:ext>
             </a:extLst>
           </p:cNvPr>
@@ -10449,7 +10449,7 @@
         </p:blipFill>
         <p:spPr>
           <a:xfrm>
-            <a:off x="9531607" y="4359526"/>
+            <a:off x="9639673" y="3819199"/>
             <a:ext cx="1941036" cy="464974"/>
           </a:xfrm>
           <a:prstGeom prst="rect">
@@ -10462,7 +10462,7 @@
           <p:cNvPr id="13" name="그림 12">
             <a:extLst>
               <a:ext uri="{FF2B5EF4-FFF2-40B4-BE49-F238E27FC236}">
-                <a16:creationId xmlns:a16="http://schemas.microsoft.com/office/drawing/2014/main" id="{E22075A5-CCE1-4885-9C50-99E4F06E2CD0}"/>
+                <a16:creationId xmlns:a16="http://schemas.microsoft.com/office/drawing/2014/main" xmlns="" id="{E22075A5-CCE1-4885-9C50-99E4F06E2CD0}"/>
               </a:ext>
             </a:extLst>
           </p:cNvPr>
@@ -10485,8 +10485,8 @@
         </p:blipFill>
         <p:spPr bwMode="auto">
           <a:xfrm>
-            <a:off x="10425830" y="2466015"/>
-            <a:ext cx="1190715" cy="270530"/>
+            <a:off x="10326077" y="2360815"/>
+            <a:ext cx="1190715" cy="342480"/>
           </a:xfrm>
           <a:prstGeom prst="rect">
             <a:avLst/>
@@ -10502,7 +10502,7 @@
           <p:cNvPr id="17" name="Picture 2" descr="kt png 이미지 검색결과">
             <a:extLst>
               <a:ext uri="{FF2B5EF4-FFF2-40B4-BE49-F238E27FC236}">
-                <a16:creationId xmlns:a16="http://schemas.microsoft.com/office/drawing/2014/main" id="{8A65C02F-DE05-4D3A-A71A-9DE0584F47E2}"/>
+                <a16:creationId xmlns:a16="http://schemas.microsoft.com/office/drawing/2014/main" xmlns="" id="{8A65C02F-DE05-4D3A-A71A-9DE0584F47E2}"/>
               </a:ext>
             </a:extLst>
           </p:cNvPr>
@@ -10526,7 +10526,7 @@
         </p:blipFill>
         <p:spPr bwMode="auto">
           <a:xfrm>
-            <a:off x="10135511" y="2873459"/>
+            <a:off x="9694937" y="2732142"/>
             <a:ext cx="366614" cy="299616"/>
           </a:xfrm>
           <a:prstGeom prst="rect">
@@ -10549,7 +10549,7 @@
           <p:cNvPr id="18" name="Picture 19">
             <a:extLst>
               <a:ext uri="{FF2B5EF4-FFF2-40B4-BE49-F238E27FC236}">
-                <a16:creationId xmlns:a16="http://schemas.microsoft.com/office/drawing/2014/main" id="{A51AA4B7-4ED7-4766-85D7-32FBC05AE70F}"/>
+                <a16:creationId xmlns:a16="http://schemas.microsoft.com/office/drawing/2014/main" xmlns="" id="{A51AA4B7-4ED7-4766-85D7-32FBC05AE70F}"/>
               </a:ext>
             </a:extLst>
           </p:cNvPr>
@@ -10567,7 +10567,7 @@
         </p:blipFill>
         <p:spPr bwMode="auto">
           <a:xfrm>
-            <a:off x="9531607" y="3472536"/>
+            <a:off x="10362879" y="2940522"/>
             <a:ext cx="1175171" cy="387757"/>
           </a:xfrm>
           <a:prstGeom prst="rect">
@@ -10609,7 +10609,7 @@
         </p:blipFill>
         <p:spPr>
           <a:xfrm>
-            <a:off x="10708978" y="3909222"/>
+            <a:off x="9678200" y="3468647"/>
             <a:ext cx="871229" cy="355929"/>
           </a:xfrm>
           <a:prstGeom prst="rect">
@@ -10640,8 +10640,8 @@
         </p:blipFill>
         <p:spPr bwMode="auto">
           <a:xfrm>
-            <a:off x="10985471" y="5074348"/>
-            <a:ext cx="463736" cy="463736"/>
+            <a:off x="9830001" y="4403597"/>
+            <a:ext cx="594159" cy="594159"/>
           </a:xfrm>
           <a:prstGeom prst="rect">
             <a:avLst/>
@@ -10685,7 +10685,7 @@
         </p:blipFill>
         <p:spPr>
           <a:xfrm>
-            <a:off x="9531607" y="2010173"/>
+            <a:off x="9581483" y="1985235"/>
             <a:ext cx="927416" cy="349287"/>
           </a:xfrm>
           <a:prstGeom prst="rect">
@@ -10805,13 +10805,13 @@
           <p:nvPr>
             <p:extLst>
               <p:ext uri="{D42A27DB-BD31-4B8C-83A1-F6EECF244321}">
-                <p14:modId xmlns:p14="http://schemas.microsoft.com/office/powerpoint/2010/main" val="3720045634"/>
+                <p14:modId xmlns:p14="http://schemas.microsoft.com/office/powerpoint/2010/main" val="168841329"/>
               </p:ext>
             </p:extLst>
           </p:nvPr>
         </p:nvGraphicFramePr>
         <p:xfrm>
-          <a:off x="1117936" y="1630385"/>
+          <a:off x="777114" y="1630385"/>
           <a:ext cx="8128000" cy="4785360"/>
         </p:xfrm>
         <a:graphic>
@@ -10824,28 +10824,28 @@
                 <a:gridCol w="2072939">
                   <a:extLst>
                     <a:ext uri="{9D8B030D-6E8A-4147-A177-3AD203B41FA5}">
-                      <a16:colId xmlns:a16="http://schemas.microsoft.com/office/drawing/2014/main" val="20000"/>
+                      <a16:colId xmlns:a16="http://schemas.microsoft.com/office/drawing/2014/main" xmlns="" val="20000"/>
                     </a:ext>
                   </a:extLst>
                 </a:gridCol>
                 <a:gridCol w="2381250">
                   <a:extLst>
                     <a:ext uri="{9D8B030D-6E8A-4147-A177-3AD203B41FA5}">
-                      <a16:colId xmlns:a16="http://schemas.microsoft.com/office/drawing/2014/main" val="20001"/>
+                      <a16:colId xmlns:a16="http://schemas.microsoft.com/office/drawing/2014/main" xmlns="" val="20001"/>
                     </a:ext>
                   </a:extLst>
                 </a:gridCol>
                 <a:gridCol w="1000125">
                   <a:extLst>
                     <a:ext uri="{9D8B030D-6E8A-4147-A177-3AD203B41FA5}">
-                      <a16:colId xmlns:a16="http://schemas.microsoft.com/office/drawing/2014/main" val="20002"/>
+                      <a16:colId xmlns:a16="http://schemas.microsoft.com/office/drawing/2014/main" xmlns="" val="20002"/>
                     </a:ext>
                   </a:extLst>
                 </a:gridCol>
                 <a:gridCol w="2673686">
                   <a:extLst>
                     <a:ext uri="{9D8B030D-6E8A-4147-A177-3AD203B41FA5}">
-                      <a16:colId xmlns:a16="http://schemas.microsoft.com/office/drawing/2014/main" val="20003"/>
+                      <a16:colId xmlns:a16="http://schemas.microsoft.com/office/drawing/2014/main" xmlns="" val="20003"/>
                     </a:ext>
                   </a:extLst>
                 </a:gridCol>
@@ -11067,7 +11067,7 @@
                 </a:tc>
                 <a:extLst>
                   <a:ext uri="{0D108BD9-81ED-4DB2-BD59-A6C34878D82A}">
-                    <a16:rowId xmlns:a16="http://schemas.microsoft.com/office/drawing/2014/main" val="10000"/>
+                    <a16:rowId xmlns:a16="http://schemas.microsoft.com/office/drawing/2014/main" xmlns="" val="10000"/>
                   </a:ext>
                 </a:extLst>
               </a:tr>
@@ -11419,7 +11419,7 @@
                 </a:tc>
                 <a:extLst>
                   <a:ext uri="{0D108BD9-81ED-4DB2-BD59-A6C34878D82A}">
-                    <a16:rowId xmlns:a16="http://schemas.microsoft.com/office/drawing/2014/main" val="10001"/>
+                    <a16:rowId xmlns:a16="http://schemas.microsoft.com/office/drawing/2014/main" xmlns="" val="10001"/>
                   </a:ext>
                 </a:extLst>
               </a:tr>
@@ -11783,7 +11783,7 @@
                 </a:tc>
                 <a:extLst>
                   <a:ext uri="{0D108BD9-81ED-4DB2-BD59-A6C34878D82A}">
-                    <a16:rowId xmlns:a16="http://schemas.microsoft.com/office/drawing/2014/main" val="10002"/>
+                    <a16:rowId xmlns:a16="http://schemas.microsoft.com/office/drawing/2014/main" xmlns="" val="10002"/>
                   </a:ext>
                 </a:extLst>
               </a:tr>
@@ -12197,7 +12197,7 @@
                 </a:tc>
                 <a:extLst>
                   <a:ext uri="{0D108BD9-81ED-4DB2-BD59-A6C34878D82A}">
-                    <a16:rowId xmlns:a16="http://schemas.microsoft.com/office/drawing/2014/main" val="10003"/>
+                    <a16:rowId xmlns:a16="http://schemas.microsoft.com/office/drawing/2014/main" xmlns="" val="10003"/>
                   </a:ext>
                 </a:extLst>
               </a:tr>
@@ -12549,7 +12549,7 @@
                 </a:tc>
                 <a:extLst>
                   <a:ext uri="{0D108BD9-81ED-4DB2-BD59-A6C34878D82A}">
-                    <a16:rowId xmlns:a16="http://schemas.microsoft.com/office/drawing/2014/main" val="10004"/>
+                    <a16:rowId xmlns:a16="http://schemas.microsoft.com/office/drawing/2014/main" xmlns="" val="10004"/>
                   </a:ext>
                 </a:extLst>
               </a:tr>
@@ -12913,7 +12913,7 @@
                 </a:tc>
                 <a:extLst>
                   <a:ext uri="{0D108BD9-81ED-4DB2-BD59-A6C34878D82A}">
-                    <a16:rowId xmlns:a16="http://schemas.microsoft.com/office/drawing/2014/main" val="10005"/>
+                    <a16:rowId xmlns:a16="http://schemas.microsoft.com/office/drawing/2014/main" xmlns="" val="10005"/>
                   </a:ext>
                 </a:extLst>
               </a:tr>
@@ -13265,7 +13265,7 @@
                 </a:tc>
                 <a:extLst>
                   <a:ext uri="{0D108BD9-81ED-4DB2-BD59-A6C34878D82A}">
-                    <a16:rowId xmlns:a16="http://schemas.microsoft.com/office/drawing/2014/main" val="10006"/>
+                    <a16:rowId xmlns:a16="http://schemas.microsoft.com/office/drawing/2014/main" xmlns="" val="10006"/>
                   </a:ext>
                 </a:extLst>
               </a:tr>
@@ -13617,7 +13617,7 @@
                 </a:tc>
                 <a:extLst>
                   <a:ext uri="{0D108BD9-81ED-4DB2-BD59-A6C34878D82A}">
-                    <a16:rowId xmlns:a16="http://schemas.microsoft.com/office/drawing/2014/main" val="10007"/>
+                    <a16:rowId xmlns:a16="http://schemas.microsoft.com/office/drawing/2014/main" xmlns="" val="10007"/>
                   </a:ext>
                 </a:extLst>
               </a:tr>
@@ -14031,7 +14031,7 @@
                 </a:tc>
                 <a:extLst>
                   <a:ext uri="{0D108BD9-81ED-4DB2-BD59-A6C34878D82A}">
-                    <a16:rowId xmlns:a16="http://schemas.microsoft.com/office/drawing/2014/main" val="10008"/>
+                    <a16:rowId xmlns:a16="http://schemas.microsoft.com/office/drawing/2014/main" xmlns="" val="10008"/>
                   </a:ext>
                 </a:extLst>
               </a:tr>
@@ -14383,7 +14383,7 @@
                 </a:tc>
                 <a:extLst>
                   <a:ext uri="{0D108BD9-81ED-4DB2-BD59-A6C34878D82A}">
-                    <a16:rowId xmlns:a16="http://schemas.microsoft.com/office/drawing/2014/main" val="10009"/>
+                    <a16:rowId xmlns:a16="http://schemas.microsoft.com/office/drawing/2014/main" xmlns="" val="10009"/>
                   </a:ext>
                 </a:extLst>
               </a:tr>
@@ -14735,7 +14735,7 @@
                 </a:tc>
                 <a:extLst>
                   <a:ext uri="{0D108BD9-81ED-4DB2-BD59-A6C34878D82A}">
-                    <a16:rowId xmlns:a16="http://schemas.microsoft.com/office/drawing/2014/main" val="10010"/>
+                    <a16:rowId xmlns:a16="http://schemas.microsoft.com/office/drawing/2014/main" xmlns="" val="10010"/>
                   </a:ext>
                 </a:extLst>
               </a:tr>
@@ -15087,7 +15087,7 @@
                 </a:tc>
                 <a:extLst>
                   <a:ext uri="{0D108BD9-81ED-4DB2-BD59-A6C34878D82A}">
-                    <a16:rowId xmlns:a16="http://schemas.microsoft.com/office/drawing/2014/main" val="10011"/>
+                    <a16:rowId xmlns:a16="http://schemas.microsoft.com/office/drawing/2014/main" xmlns="" val="10011"/>
                   </a:ext>
                 </a:extLst>
               </a:tr>
@@ -15439,7 +15439,7 @@
                 </a:tc>
                 <a:extLst>
                   <a:ext uri="{0D108BD9-81ED-4DB2-BD59-A6C34878D82A}">
-                    <a16:rowId xmlns:a16="http://schemas.microsoft.com/office/drawing/2014/main" val="1913449048"/>
+                    <a16:rowId xmlns:a16="http://schemas.microsoft.com/office/drawing/2014/main" xmlns="" val="1913449048"/>
                   </a:ext>
                 </a:extLst>
               </a:tr>
@@ -15791,7 +15791,7 @@
                 </a:tc>
                 <a:extLst>
                   <a:ext uri="{0D108BD9-81ED-4DB2-BD59-A6C34878D82A}">
-                    <a16:rowId xmlns:a16="http://schemas.microsoft.com/office/drawing/2014/main" val="3907166578"/>
+                    <a16:rowId xmlns:a16="http://schemas.microsoft.com/office/drawing/2014/main" xmlns="" val="3907166578"/>
                   </a:ext>
                 </a:extLst>
               </a:tr>
@@ -16143,7 +16143,7 @@
                 </a:tc>
                 <a:extLst>
                   <a:ext uri="{0D108BD9-81ED-4DB2-BD59-A6C34878D82A}">
-                    <a16:rowId xmlns:a16="http://schemas.microsoft.com/office/drawing/2014/main" val="1522583133"/>
+                    <a16:rowId xmlns:a16="http://schemas.microsoft.com/office/drawing/2014/main" xmlns="" val="1522583133"/>
                   </a:ext>
                 </a:extLst>
               </a:tr>
@@ -16507,7 +16507,7 @@
                 </a:tc>
                 <a:extLst>
                   <a:ext uri="{0D108BD9-81ED-4DB2-BD59-A6C34878D82A}">
-                    <a16:rowId xmlns:a16="http://schemas.microsoft.com/office/drawing/2014/main" val="1376781956"/>
+                    <a16:rowId xmlns:a16="http://schemas.microsoft.com/office/drawing/2014/main" xmlns="" val="1376781956"/>
                   </a:ext>
                 </a:extLst>
               </a:tr>
@@ -16520,7 +16520,7 @@
           <p:cNvPr id="15" name="그림 14">
             <a:extLst>
               <a:ext uri="{FF2B5EF4-FFF2-40B4-BE49-F238E27FC236}">
-                <a16:creationId xmlns:a16="http://schemas.microsoft.com/office/drawing/2014/main" id="{0D30D4A2-F239-4902-A93F-E539F2144DE8}"/>
+                <a16:creationId xmlns:a16="http://schemas.microsoft.com/office/drawing/2014/main" xmlns="" id="{0D30D4A2-F239-4902-A93F-E539F2144DE8}"/>
               </a:ext>
             </a:extLst>
           </p:cNvPr>
@@ -16537,7 +16537,7 @@
         </p:blipFill>
         <p:spPr>
           <a:xfrm>
-            <a:off x="10636749" y="5611049"/>
+            <a:off x="10670000" y="4704962"/>
             <a:ext cx="1232922" cy="337787"/>
           </a:xfrm>
           <a:prstGeom prst="rect">
@@ -16550,7 +16550,7 @@
           <p:cNvPr id="21" name="그림 20">
             <a:extLst>
               <a:ext uri="{FF2B5EF4-FFF2-40B4-BE49-F238E27FC236}">
-                <a16:creationId xmlns:a16="http://schemas.microsoft.com/office/drawing/2014/main" id="{7BE99C68-3F01-4EA9-980F-087F635FA392}"/>
+                <a16:creationId xmlns:a16="http://schemas.microsoft.com/office/drawing/2014/main" xmlns="" id="{7BE99C68-3F01-4EA9-980F-087F635FA392}"/>
               </a:ext>
             </a:extLst>
           </p:cNvPr>
@@ -16573,8 +16573,8 @@
         </p:blipFill>
         <p:spPr>
           <a:xfrm>
-            <a:off x="9516807" y="4416842"/>
-            <a:ext cx="812464" cy="252060"/>
+            <a:off x="9342238" y="4172989"/>
+            <a:ext cx="1089377" cy="337970"/>
           </a:xfrm>
           <a:prstGeom prst="rect">
             <a:avLst/>
@@ -16586,7 +16586,7 @@
           <p:cNvPr id="22" name="그림 21">
             <a:extLst>
               <a:ext uri="{FF2B5EF4-FFF2-40B4-BE49-F238E27FC236}">
-                <a16:creationId xmlns:a16="http://schemas.microsoft.com/office/drawing/2014/main" id="{65836530-8145-479C-98AD-B53AA83E8E41}"/>
+                <a16:creationId xmlns:a16="http://schemas.microsoft.com/office/drawing/2014/main" xmlns="" id="{65836530-8145-479C-98AD-B53AA83E8E41}"/>
               </a:ext>
             </a:extLst>
           </p:cNvPr>
@@ -16603,8 +16603,8 @@
         </p:blipFill>
         <p:spPr>
           <a:xfrm>
-            <a:off x="10703031" y="4795822"/>
-            <a:ext cx="867915" cy="273322"/>
+            <a:off x="9256616" y="4711016"/>
+            <a:ext cx="1084417" cy="341502"/>
           </a:xfrm>
           <a:prstGeom prst="rect">
             <a:avLst/>
@@ -16616,7 +16616,7 @@
           <p:cNvPr id="23" name="그림 22">
             <a:extLst>
               <a:ext uri="{FF2B5EF4-FFF2-40B4-BE49-F238E27FC236}">
-                <a16:creationId xmlns:a16="http://schemas.microsoft.com/office/drawing/2014/main" id="{8619A116-A858-4B41-A8C7-96A7329E8EE8}"/>
+                <a16:creationId xmlns:a16="http://schemas.microsoft.com/office/drawing/2014/main" xmlns="" id="{8619A116-A858-4B41-A8C7-96A7329E8EE8}"/>
               </a:ext>
             </a:extLst>
           </p:cNvPr>
@@ -16633,7 +16633,7 @@
         </p:blipFill>
         <p:spPr>
           <a:xfrm>
-            <a:off x="9424796" y="5221317"/>
+            <a:off x="10429268" y="3733340"/>
             <a:ext cx="1621416" cy="311811"/>
           </a:xfrm>
           <a:prstGeom prst="rect">
@@ -16657,7 +16657,7 @@
         </p:blipFill>
         <p:spPr>
           <a:xfrm>
-            <a:off x="9508129" y="6032003"/>
+            <a:off x="10854791" y="2391028"/>
             <a:ext cx="1027986" cy="298243"/>
           </a:xfrm>
           <a:prstGeom prst="rect">
@@ -16670,7 +16670,7 @@
           <p:cNvPr id="25" name="그림 24">
             <a:extLst>
               <a:ext uri="{FF2B5EF4-FFF2-40B4-BE49-F238E27FC236}">
-                <a16:creationId xmlns:a16="http://schemas.microsoft.com/office/drawing/2014/main" id="{6387FAFA-4C74-4A02-A36C-B49A9C32BD9E}"/>
+                <a16:creationId xmlns:a16="http://schemas.microsoft.com/office/drawing/2014/main" xmlns="" id="{6387FAFA-4C74-4A02-A36C-B49A9C32BD9E}"/>
               </a:ext>
             </a:extLst>
           </p:cNvPr>
@@ -16687,8 +16687,8 @@
         </p:blipFill>
         <p:spPr>
           <a:xfrm>
-            <a:off x="9587484" y="3633770"/>
-            <a:ext cx="639168" cy="222345"/>
+            <a:off x="9304851" y="3649289"/>
+            <a:ext cx="881316" cy="306580"/>
           </a:xfrm>
           <a:prstGeom prst="rect">
             <a:avLst/>
@@ -16700,7 +16700,7 @@
           <p:cNvPr id="26" name="그림 25">
             <a:extLst>
               <a:ext uri="{FF2B5EF4-FFF2-40B4-BE49-F238E27FC236}">
-                <a16:creationId xmlns:a16="http://schemas.microsoft.com/office/drawing/2014/main" id="{D0094439-CFE5-4EB8-B3CB-2C034A1B547B}"/>
+                <a16:creationId xmlns:a16="http://schemas.microsoft.com/office/drawing/2014/main" xmlns="" id="{D0094439-CFE5-4EB8-B3CB-2C034A1B547B}"/>
               </a:ext>
             </a:extLst>
           </p:cNvPr>
@@ -16717,8 +16717,8 @@
         </p:blipFill>
         <p:spPr>
           <a:xfrm>
-            <a:off x="10673074" y="3995262"/>
-            <a:ext cx="903357" cy="326945"/>
+            <a:off x="10274062" y="2701636"/>
+            <a:ext cx="1170249" cy="423539"/>
           </a:xfrm>
           <a:prstGeom prst="rect">
             <a:avLst/>
@@ -16730,7 +16730,7 @@
           <p:cNvPr id="27" name="그림 26">
             <a:extLst>
               <a:ext uri="{FF2B5EF4-FFF2-40B4-BE49-F238E27FC236}">
-                <a16:creationId xmlns:a16="http://schemas.microsoft.com/office/drawing/2014/main" id="{266FEB56-7C66-45C3-B6B4-E7718EFD025B}"/>
+                <a16:creationId xmlns:a16="http://schemas.microsoft.com/office/drawing/2014/main" xmlns="" id="{266FEB56-7C66-45C3-B6B4-E7718EFD025B}"/>
               </a:ext>
             </a:extLst>
           </p:cNvPr>
@@ -16747,8 +16747,8 @@
         </p:blipFill>
         <p:spPr>
           <a:xfrm>
-            <a:off x="9467523" y="2825901"/>
-            <a:ext cx="1109197" cy="319961"/>
+            <a:off x="9218140" y="3092335"/>
+            <a:ext cx="1424712" cy="410975"/>
           </a:xfrm>
           <a:prstGeom prst="rect">
             <a:avLst/>
@@ -16771,8 +16771,8 @@
         </p:blipFill>
         <p:spPr>
           <a:xfrm>
-            <a:off x="9467523" y="2036985"/>
-            <a:ext cx="1339275" cy="298603"/>
+            <a:off x="10889673" y="4304711"/>
+            <a:ext cx="939590" cy="209490"/>
           </a:xfrm>
           <a:prstGeom prst="rect">
             <a:avLst/>
@@ -16795,7 +16795,7 @@
         </p:blipFill>
         <p:spPr>
           <a:xfrm>
-            <a:off x="10673074" y="2380498"/>
+            <a:off x="10964019" y="3178521"/>
             <a:ext cx="862805" cy="384691"/>
           </a:xfrm>
           <a:prstGeom prst="rect">
@@ -16819,8 +16819,8 @@
         </p:blipFill>
         <p:spPr>
           <a:xfrm>
-            <a:off x="10635506" y="3155572"/>
-            <a:ext cx="1002964" cy="326167"/>
+            <a:off x="9180779" y="2327564"/>
+            <a:ext cx="1197421" cy="389405"/>
           </a:xfrm>
           <a:prstGeom prst="rect">
             <a:avLst/>

--- a/99ref/버티카_국내레퍼런스.pptx
+++ b/99ref/버티카_국내레퍼런스.pptx
@@ -206,7 +206,7 @@
           <a:p>
             <a:fld id="{A640A901-53E6-41C4-9EEA-8BEE09C37D41}" type="datetimeFigureOut">
               <a:rPr lang="ko-KR" altLang="en-US" smtClean="0"/>
-              <a:t>2026-04-27</a:t>
+              <a:t>2026-04-28</a:t>
             </a:fld>
             <a:endParaRPr lang="ko-KR" altLang="en-US"/>
           </a:p>
@@ -371,7 +371,7 @@
           <a:p>
             <a:fld id="{14B429C4-6C66-4BB2-903E-0003D83D0C80}" type="datetimeFigureOut">
               <a:rPr lang="ko-KR" altLang="en-US" smtClean="0"/>
-              <a:t>2026-04-27</a:t>
+              <a:t>2026-04-28</a:t>
             </a:fld>
             <a:endParaRPr lang="ko-KR" altLang="en-US"/>
           </a:p>
@@ -1279,7 +1279,7 @@
           <a:p>
             <a:fld id="{5A08F6DC-6B17-467A-8F5F-542C658D840B}" type="datetime1">
               <a:rPr lang="ko-KR" altLang="en-US" smtClean="0"/>
-              <a:t>2026-04-27</a:t>
+              <a:t>2026-04-28</a:t>
             </a:fld>
             <a:endParaRPr lang="ko-KR" altLang="en-US"/>
           </a:p>
@@ -1898,28 +1898,28 @@
                 <a:gridCol w="1616546">
                   <a:extLst>
                     <a:ext uri="{9D8B030D-6E8A-4147-A177-3AD203B41FA5}">
-                      <a16:colId xmlns:a16="http://schemas.microsoft.com/office/drawing/2014/main" xmlns="" val="20000"/>
+                      <a16:colId xmlns="" xmlns:a16="http://schemas.microsoft.com/office/drawing/2014/main" val="20000"/>
                     </a:ext>
                   </a:extLst>
                 </a:gridCol>
                 <a:gridCol w="2908329">
                   <a:extLst>
                     <a:ext uri="{9D8B030D-6E8A-4147-A177-3AD203B41FA5}">
-                      <a16:colId xmlns:a16="http://schemas.microsoft.com/office/drawing/2014/main" xmlns="" val="20001"/>
+                      <a16:colId xmlns="" xmlns:a16="http://schemas.microsoft.com/office/drawing/2014/main" val="20001"/>
                     </a:ext>
                   </a:extLst>
                 </a:gridCol>
                 <a:gridCol w="980573">
                   <a:extLst>
                     <a:ext uri="{9D8B030D-6E8A-4147-A177-3AD203B41FA5}">
-                      <a16:colId xmlns:a16="http://schemas.microsoft.com/office/drawing/2014/main" xmlns="" val="20002"/>
+                      <a16:colId xmlns="" xmlns:a16="http://schemas.microsoft.com/office/drawing/2014/main" val="20002"/>
                     </a:ext>
                   </a:extLst>
                 </a:gridCol>
                 <a:gridCol w="2578956">
                   <a:extLst>
                     <a:ext uri="{9D8B030D-6E8A-4147-A177-3AD203B41FA5}">
-                      <a16:colId xmlns:a16="http://schemas.microsoft.com/office/drawing/2014/main" xmlns="" val="20003"/>
+                      <a16:colId xmlns="" xmlns:a16="http://schemas.microsoft.com/office/drawing/2014/main" val="20003"/>
                     </a:ext>
                   </a:extLst>
                 </a:gridCol>
@@ -2141,7 +2141,7 @@
                 </a:tc>
                 <a:extLst>
                   <a:ext uri="{0D108BD9-81ED-4DB2-BD59-A6C34878D82A}">
-                    <a16:rowId xmlns:a16="http://schemas.microsoft.com/office/drawing/2014/main" xmlns="" val="10000"/>
+                    <a16:rowId xmlns="" xmlns:a16="http://schemas.microsoft.com/office/drawing/2014/main" val="10000"/>
                   </a:ext>
                 </a:extLst>
               </a:tr>
@@ -2771,7 +2771,7 @@
                 </a:tc>
                 <a:extLst>
                   <a:ext uri="{0D108BD9-81ED-4DB2-BD59-A6C34878D82A}">
-                    <a16:rowId xmlns:a16="http://schemas.microsoft.com/office/drawing/2014/main" xmlns="" val="10001"/>
+                    <a16:rowId xmlns="" xmlns:a16="http://schemas.microsoft.com/office/drawing/2014/main" val="10001"/>
                   </a:ext>
                 </a:extLst>
               </a:tr>
@@ -3252,7 +3252,7 @@
                 </a:tc>
                 <a:extLst>
                   <a:ext uri="{0D108BD9-81ED-4DB2-BD59-A6C34878D82A}">
-                    <a16:rowId xmlns:a16="http://schemas.microsoft.com/office/drawing/2014/main" xmlns="" val="10002"/>
+                    <a16:rowId xmlns="" xmlns:a16="http://schemas.microsoft.com/office/drawing/2014/main" val="10002"/>
                   </a:ext>
                 </a:extLst>
               </a:tr>
@@ -3585,7 +3585,7 @@
                 </a:tc>
                 <a:extLst>
                   <a:ext uri="{0D108BD9-81ED-4DB2-BD59-A6C34878D82A}">
-                    <a16:rowId xmlns:a16="http://schemas.microsoft.com/office/drawing/2014/main" xmlns="" val="10003"/>
+                    <a16:rowId xmlns="" xmlns:a16="http://schemas.microsoft.com/office/drawing/2014/main" val="10003"/>
                   </a:ext>
                 </a:extLst>
               </a:tr>
@@ -3949,7 +3949,7 @@
                 </a:tc>
                 <a:extLst>
                   <a:ext uri="{0D108BD9-81ED-4DB2-BD59-A6C34878D82A}">
-                    <a16:rowId xmlns:a16="http://schemas.microsoft.com/office/drawing/2014/main" xmlns="" val="10004"/>
+                    <a16:rowId xmlns="" xmlns:a16="http://schemas.microsoft.com/office/drawing/2014/main" val="10004"/>
                   </a:ext>
                 </a:extLst>
               </a:tr>
@@ -4402,7 +4402,7 @@
                 </a:tc>
                 <a:extLst>
                   <a:ext uri="{0D108BD9-81ED-4DB2-BD59-A6C34878D82A}">
-                    <a16:rowId xmlns:a16="http://schemas.microsoft.com/office/drawing/2014/main" xmlns="" val="10005"/>
+                    <a16:rowId xmlns="" xmlns:a16="http://schemas.microsoft.com/office/drawing/2014/main" val="10005"/>
                   </a:ext>
                 </a:extLst>
               </a:tr>
@@ -4769,7 +4769,7 @@
                 </a:tc>
                 <a:extLst>
                   <a:ext uri="{0D108BD9-81ED-4DB2-BD59-A6C34878D82A}">
-                    <a16:rowId xmlns:a16="http://schemas.microsoft.com/office/drawing/2014/main" xmlns="" val="10006"/>
+                    <a16:rowId xmlns="" xmlns:a16="http://schemas.microsoft.com/office/drawing/2014/main" val="10006"/>
                   </a:ext>
                 </a:extLst>
               </a:tr>
@@ -5174,7 +5174,7 @@
                 </a:tc>
                 <a:extLst>
                   <a:ext uri="{0D108BD9-81ED-4DB2-BD59-A6C34878D82A}">
-                    <a16:rowId xmlns:a16="http://schemas.microsoft.com/office/drawing/2014/main" xmlns="" val="1757568263"/>
+                    <a16:rowId xmlns="" xmlns:a16="http://schemas.microsoft.com/office/drawing/2014/main" val="1757568263"/>
                   </a:ext>
                 </a:extLst>
               </a:tr>
@@ -5187,7 +5187,7 @@
           <p:cNvPr id="70" name="그림 69">
             <a:extLst>
               <a:ext uri="{FF2B5EF4-FFF2-40B4-BE49-F238E27FC236}">
-                <a16:creationId xmlns:a16="http://schemas.microsoft.com/office/drawing/2014/main" xmlns="" id="{39E8787F-53D8-4DC8-AA4B-9086EEE110D1}"/>
+                <a16:creationId xmlns="" xmlns:a16="http://schemas.microsoft.com/office/drawing/2014/main" id="{39E8787F-53D8-4DC8-AA4B-9086EEE110D1}"/>
               </a:ext>
             </a:extLst>
           </p:cNvPr>
@@ -5204,7 +5204,7 @@
         </p:blipFill>
         <p:spPr>
           <a:xfrm>
-            <a:off x="10098114" y="3459756"/>
+            <a:off x="10089801" y="3426505"/>
             <a:ext cx="1930921" cy="577286"/>
           </a:xfrm>
           <a:prstGeom prst="rect">
@@ -5217,7 +5217,7 @@
           <p:cNvPr id="87" name="Picture 2">
             <a:extLst>
               <a:ext uri="{FF2B5EF4-FFF2-40B4-BE49-F238E27FC236}">
-                <a16:creationId xmlns:a16="http://schemas.microsoft.com/office/drawing/2014/main" xmlns="" id="{E1D6FAB2-6CA7-4E1A-9D7B-FA7D270A7A7D}"/>
+                <a16:creationId xmlns="" xmlns:a16="http://schemas.microsoft.com/office/drawing/2014/main" id="{E1D6FAB2-6CA7-4E1A-9D7B-FA7D270A7A7D}"/>
               </a:ext>
             </a:extLst>
           </p:cNvPr>
@@ -5241,7 +5241,7 @@
         </p:blipFill>
         <p:spPr bwMode="auto">
           <a:xfrm>
-            <a:off x="9412668" y="3025584"/>
+            <a:off x="9470857" y="2992333"/>
             <a:ext cx="1900482" cy="394291"/>
           </a:xfrm>
           <a:prstGeom prst="rect">
@@ -5264,7 +5264,7 @@
           <p:cNvPr id="89" name="그림 88">
             <a:extLst>
               <a:ext uri="{FF2B5EF4-FFF2-40B4-BE49-F238E27FC236}">
-                <a16:creationId xmlns:a16="http://schemas.microsoft.com/office/drawing/2014/main" xmlns="" id="{674FFF98-1418-4BED-BA58-9227A8A41BD7}"/>
+                <a16:creationId xmlns="" xmlns:a16="http://schemas.microsoft.com/office/drawing/2014/main" id="{674FFF98-1418-4BED-BA58-9227A8A41BD7}"/>
               </a:ext>
             </a:extLst>
           </p:cNvPr>
@@ -5281,7 +5281,7 @@
         </p:blipFill>
         <p:spPr>
           <a:xfrm>
-            <a:off x="9312915" y="1924567"/>
+            <a:off x="9329541" y="1991069"/>
             <a:ext cx="1837530" cy="531517"/>
           </a:xfrm>
           <a:prstGeom prst="rect">
@@ -5322,7 +5322,7 @@
         </p:blipFill>
         <p:spPr bwMode="auto">
           <a:xfrm>
-            <a:off x="10507322" y="2215083"/>
+            <a:off x="10723917" y="2206769"/>
             <a:ext cx="1592774" cy="836829"/>
           </a:xfrm>
           <a:prstGeom prst="rect">
@@ -5345,7 +5345,7 @@
           <p:cNvPr id="91" name="그림 90">
             <a:extLst>
               <a:ext uri="{FF2B5EF4-FFF2-40B4-BE49-F238E27FC236}">
-                <a16:creationId xmlns:a16="http://schemas.microsoft.com/office/drawing/2014/main" xmlns="" id="{8480CA0B-6F4D-4BFB-8F68-61E78545FDF5}"/>
+                <a16:creationId xmlns="" xmlns:a16="http://schemas.microsoft.com/office/drawing/2014/main" id="{8480CA0B-6F4D-4BFB-8F68-61E78545FDF5}"/>
               </a:ext>
             </a:extLst>
           </p:cNvPr>
@@ -5362,7 +5362,7 @@
         </p:blipFill>
         <p:spPr>
           <a:xfrm>
-            <a:off x="9327122" y="3968525"/>
+            <a:off x="9343748" y="3910336"/>
             <a:ext cx="1645874" cy="486282"/>
           </a:xfrm>
           <a:prstGeom prst="rect">
@@ -5402,7 +5402,7 @@
         </p:blipFill>
         <p:spPr>
           <a:xfrm>
-            <a:off x="10175564" y="4280478"/>
+            <a:off x="10117375" y="4263852"/>
             <a:ext cx="2016436" cy="664238"/>
           </a:xfrm>
           <a:prstGeom prst="rect">
@@ -5451,7 +5451,7 @@
           <p:cNvPr id="5" name="그림 4">
             <a:extLst>
               <a:ext uri="{FF2B5EF4-FFF2-40B4-BE49-F238E27FC236}">
-                <a16:creationId xmlns:a16="http://schemas.microsoft.com/office/drawing/2014/main" xmlns="" id="{679A1E04-F04B-D5E7-88EB-DECF86E8B13D}"/>
+                <a16:creationId xmlns="" xmlns:a16="http://schemas.microsoft.com/office/drawing/2014/main" id="{679A1E04-F04B-D5E7-88EB-DECF86E8B13D}"/>
               </a:ext>
             </a:extLst>
           </p:cNvPr>
@@ -5468,7 +5468,7 @@
         </p:blipFill>
         <p:spPr>
           <a:xfrm>
-            <a:off x="9407458" y="4811631"/>
+            <a:off x="9432396" y="4828257"/>
             <a:ext cx="1656105" cy="333947"/>
           </a:xfrm>
           <a:prstGeom prst="rect">
@@ -5476,6 +5476,52 @@
           </a:prstGeom>
         </p:spPr>
       </p:pic>
+      <p:sp>
+        <p:nvSpPr>
+          <p:cNvPr id="4" name="직사각형 3"/>
+          <p:cNvSpPr/>
+          <p:nvPr/>
+        </p:nvSpPr>
+        <p:spPr>
+          <a:xfrm>
+            <a:off x="9343505" y="1936865"/>
+            <a:ext cx="2709950" cy="3341717"/>
+          </a:xfrm>
+          <a:prstGeom prst="rect">
+            <a:avLst/>
+          </a:prstGeom>
+          <a:noFill/>
+          <a:ln>
+            <a:solidFill>
+              <a:schemeClr val="tx1"/>
+            </a:solidFill>
+          </a:ln>
+        </p:spPr>
+        <p:style>
+          <a:lnRef idx="2">
+            <a:schemeClr val="accent1">
+              <a:shade val="50000"/>
+            </a:schemeClr>
+          </a:lnRef>
+          <a:fillRef idx="1">
+            <a:schemeClr val="accent1"/>
+          </a:fillRef>
+          <a:effectRef idx="0">
+            <a:schemeClr val="accent1"/>
+          </a:effectRef>
+          <a:fontRef idx="minor">
+            <a:schemeClr val="lt1"/>
+          </a:fontRef>
+        </p:style>
+        <p:txBody>
+          <a:bodyPr rtlCol="0" anchor="ctr"/>
+          <a:lstStyle/>
+          <a:p>
+            <a:pPr algn="ctr"/>
+            <a:endParaRPr lang="ko-KR" altLang="en-US"/>
+          </a:p>
+        </p:txBody>
+      </p:sp>
     </p:spTree>
     <p:extLst>
       <p:ext uri="{BB962C8B-B14F-4D97-AF65-F5344CB8AC3E}">
@@ -5566,28 +5612,28 @@
                 <a:gridCol w="2044364">
                   <a:extLst>
                     <a:ext uri="{9D8B030D-6E8A-4147-A177-3AD203B41FA5}">
-                      <a16:colId xmlns:a16="http://schemas.microsoft.com/office/drawing/2014/main" xmlns="" val="20000"/>
+                      <a16:colId xmlns="" xmlns:a16="http://schemas.microsoft.com/office/drawing/2014/main" val="20000"/>
                     </a:ext>
                   </a:extLst>
                 </a:gridCol>
                 <a:gridCol w="2181225">
                   <a:extLst>
                     <a:ext uri="{9D8B030D-6E8A-4147-A177-3AD203B41FA5}">
-                      <a16:colId xmlns:a16="http://schemas.microsoft.com/office/drawing/2014/main" xmlns="" val="20001"/>
+                      <a16:colId xmlns="" xmlns:a16="http://schemas.microsoft.com/office/drawing/2014/main" val="20001"/>
                     </a:ext>
                   </a:extLst>
                 </a:gridCol>
                 <a:gridCol w="1021180">
                   <a:extLst>
                     <a:ext uri="{9D8B030D-6E8A-4147-A177-3AD203B41FA5}">
-                      <a16:colId xmlns:a16="http://schemas.microsoft.com/office/drawing/2014/main" xmlns="" val="20002"/>
+                      <a16:colId xmlns="" xmlns:a16="http://schemas.microsoft.com/office/drawing/2014/main" val="20002"/>
                     </a:ext>
                   </a:extLst>
                 </a:gridCol>
                 <a:gridCol w="2881231">
                   <a:extLst>
                     <a:ext uri="{9D8B030D-6E8A-4147-A177-3AD203B41FA5}">
-                      <a16:colId xmlns:a16="http://schemas.microsoft.com/office/drawing/2014/main" xmlns="" val="20003"/>
+                      <a16:colId xmlns="" xmlns:a16="http://schemas.microsoft.com/office/drawing/2014/main" val="20003"/>
                     </a:ext>
                   </a:extLst>
                 </a:gridCol>
@@ -5809,7 +5855,7 @@
                 </a:tc>
                 <a:extLst>
                   <a:ext uri="{0D108BD9-81ED-4DB2-BD59-A6C34878D82A}">
-                    <a16:rowId xmlns:a16="http://schemas.microsoft.com/office/drawing/2014/main" xmlns="" val="10000"/>
+                    <a16:rowId xmlns="" xmlns:a16="http://schemas.microsoft.com/office/drawing/2014/main" val="10000"/>
                   </a:ext>
                 </a:extLst>
               </a:tr>
@@ -6252,7 +6298,7 @@
                 </a:tc>
                 <a:extLst>
                   <a:ext uri="{0D108BD9-81ED-4DB2-BD59-A6C34878D82A}">
-                    <a16:rowId xmlns:a16="http://schemas.microsoft.com/office/drawing/2014/main" xmlns="" val="10001"/>
+                    <a16:rowId xmlns="" xmlns:a16="http://schemas.microsoft.com/office/drawing/2014/main" val="10001"/>
                   </a:ext>
                 </a:extLst>
               </a:tr>
@@ -6779,7 +6825,7 @@
                 </a:tc>
                 <a:extLst>
                   <a:ext uri="{0D108BD9-81ED-4DB2-BD59-A6C34878D82A}">
-                    <a16:rowId xmlns:a16="http://schemas.microsoft.com/office/drawing/2014/main" xmlns="" val="10002"/>
+                    <a16:rowId xmlns="" xmlns:a16="http://schemas.microsoft.com/office/drawing/2014/main" val="10002"/>
                   </a:ext>
                 </a:extLst>
               </a:tr>
@@ -7154,7 +7200,7 @@
                 </a:tc>
                 <a:extLst>
                   <a:ext uri="{0D108BD9-81ED-4DB2-BD59-A6C34878D82A}">
-                    <a16:rowId xmlns:a16="http://schemas.microsoft.com/office/drawing/2014/main" xmlns="" val="10004"/>
+                    <a16:rowId xmlns="" xmlns:a16="http://schemas.microsoft.com/office/drawing/2014/main" val="10004"/>
                   </a:ext>
                 </a:extLst>
               </a:tr>
@@ -7705,7 +7751,7 @@
                 </a:tc>
                 <a:extLst>
                   <a:ext uri="{0D108BD9-81ED-4DB2-BD59-A6C34878D82A}">
-                    <a16:rowId xmlns:a16="http://schemas.microsoft.com/office/drawing/2014/main" xmlns="" val="10007"/>
+                    <a16:rowId xmlns="" xmlns:a16="http://schemas.microsoft.com/office/drawing/2014/main" val="10007"/>
                   </a:ext>
                 </a:extLst>
               </a:tr>
@@ -8068,7 +8114,7 @@
                 </a:tc>
                 <a:extLst>
                   <a:ext uri="{0D108BD9-81ED-4DB2-BD59-A6C34878D82A}">
-                    <a16:rowId xmlns:a16="http://schemas.microsoft.com/office/drawing/2014/main" xmlns="" val="10008"/>
+                    <a16:rowId xmlns="" xmlns:a16="http://schemas.microsoft.com/office/drawing/2014/main" val="10008"/>
                   </a:ext>
                 </a:extLst>
               </a:tr>
@@ -8523,7 +8569,7 @@
                 </a:tc>
                 <a:extLst>
                   <a:ext uri="{0D108BD9-81ED-4DB2-BD59-A6C34878D82A}">
-                    <a16:rowId xmlns:a16="http://schemas.microsoft.com/office/drawing/2014/main" xmlns="" val="10009"/>
+                    <a16:rowId xmlns="" xmlns:a16="http://schemas.microsoft.com/office/drawing/2014/main" val="10009"/>
                   </a:ext>
                 </a:extLst>
               </a:tr>
@@ -8946,7 +8992,7 @@
                 </a:tc>
                 <a:extLst>
                   <a:ext uri="{0D108BD9-81ED-4DB2-BD59-A6C34878D82A}">
-                    <a16:rowId xmlns:a16="http://schemas.microsoft.com/office/drawing/2014/main" xmlns="" val="10012"/>
+                    <a16:rowId xmlns="" xmlns:a16="http://schemas.microsoft.com/office/drawing/2014/main" val="10012"/>
                   </a:ext>
                 </a:extLst>
               </a:tr>
@@ -9310,7 +9356,7 @@
                 </a:tc>
                 <a:extLst>
                   <a:ext uri="{0D108BD9-81ED-4DB2-BD59-A6C34878D82A}">
-                    <a16:rowId xmlns:a16="http://schemas.microsoft.com/office/drawing/2014/main" xmlns="" val="10013"/>
+                    <a16:rowId xmlns="" xmlns:a16="http://schemas.microsoft.com/office/drawing/2014/main" val="10013"/>
                   </a:ext>
                 </a:extLst>
               </a:tr>
@@ -9719,7 +9765,7 @@
                 </a:tc>
                 <a:extLst>
                   <a:ext uri="{0D108BD9-81ED-4DB2-BD59-A6C34878D82A}">
-                    <a16:rowId xmlns:a16="http://schemas.microsoft.com/office/drawing/2014/main" xmlns="" val="1174830984"/>
+                    <a16:rowId xmlns="" xmlns:a16="http://schemas.microsoft.com/office/drawing/2014/main" val="1174830984"/>
                   </a:ext>
                 </a:extLst>
               </a:tr>
@@ -10041,7 +10087,7 @@
                 </a:tc>
                 <a:extLst>
                   <a:ext uri="{0D108BD9-81ED-4DB2-BD59-A6C34878D82A}">
-                    <a16:rowId xmlns:a16="http://schemas.microsoft.com/office/drawing/2014/main" xmlns="" val="3254849268"/>
+                    <a16:rowId xmlns="" xmlns:a16="http://schemas.microsoft.com/office/drawing/2014/main" val="3254849268"/>
                   </a:ext>
                 </a:extLst>
               </a:tr>
@@ -10378,7 +10424,7 @@
                 </a:tc>
                 <a:extLst>
                   <a:ext uri="{0D108BD9-81ED-4DB2-BD59-A6C34878D82A}">
-                    <a16:rowId xmlns:a16="http://schemas.microsoft.com/office/drawing/2014/main" xmlns="" val="3891974251"/>
+                    <a16:rowId xmlns="" xmlns:a16="http://schemas.microsoft.com/office/drawing/2014/main" val="3891974251"/>
                   </a:ext>
                 </a:extLst>
               </a:tr>
@@ -10409,8 +10455,8 @@
         </p:blipFill>
         <p:spPr bwMode="auto">
           <a:xfrm>
-            <a:off x="10590416" y="4128119"/>
-            <a:ext cx="891596" cy="630847"/>
+            <a:off x="10767119" y="4313295"/>
+            <a:ext cx="1120082" cy="792510"/>
           </a:xfrm>
           <a:prstGeom prst="rect">
             <a:avLst/>
@@ -10432,7 +10478,7 @@
           <p:cNvPr id="12" name="그림 11">
             <a:extLst>
               <a:ext uri="{FF2B5EF4-FFF2-40B4-BE49-F238E27FC236}">
-                <a16:creationId xmlns:a16="http://schemas.microsoft.com/office/drawing/2014/main" xmlns="" id="{567C6C7C-BEFB-475F-952B-7402E9223C6A}"/>
+                <a16:creationId xmlns="" xmlns:a16="http://schemas.microsoft.com/office/drawing/2014/main" id="{567C6C7C-BEFB-475F-952B-7402E9223C6A}"/>
               </a:ext>
             </a:extLst>
           </p:cNvPr>
@@ -10449,8 +10495,8 @@
         </p:blipFill>
         <p:spPr>
           <a:xfrm>
-            <a:off x="9639673" y="3819199"/>
-            <a:ext cx="1941036" cy="464974"/>
+            <a:off x="9474089" y="3801183"/>
+            <a:ext cx="2438458" cy="584132"/>
           </a:xfrm>
           <a:prstGeom prst="rect">
             <a:avLst/>
@@ -10462,7 +10508,7 @@
           <p:cNvPr id="13" name="그림 12">
             <a:extLst>
               <a:ext uri="{FF2B5EF4-FFF2-40B4-BE49-F238E27FC236}">
-                <a16:creationId xmlns:a16="http://schemas.microsoft.com/office/drawing/2014/main" xmlns="" id="{E22075A5-CCE1-4885-9C50-99E4F06E2CD0}"/>
+                <a16:creationId xmlns="" xmlns:a16="http://schemas.microsoft.com/office/drawing/2014/main" id="{E22075A5-CCE1-4885-9C50-99E4F06E2CD0}"/>
               </a:ext>
             </a:extLst>
           </p:cNvPr>
@@ -10485,8 +10531,8 @@
         </p:blipFill>
         <p:spPr bwMode="auto">
           <a:xfrm>
-            <a:off x="10326077" y="2360815"/>
-            <a:ext cx="1190715" cy="342480"/>
+            <a:off x="10447827" y="2416685"/>
+            <a:ext cx="1495856" cy="430246"/>
           </a:xfrm>
           <a:prstGeom prst="rect">
             <a:avLst/>
@@ -10502,7 +10548,7 @@
           <p:cNvPr id="17" name="Picture 2" descr="kt png 이미지 검색결과">
             <a:extLst>
               <a:ext uri="{FF2B5EF4-FFF2-40B4-BE49-F238E27FC236}">
-                <a16:creationId xmlns:a16="http://schemas.microsoft.com/office/drawing/2014/main" xmlns="" id="{8A65C02F-DE05-4D3A-A71A-9DE0584F47E2}"/>
+                <a16:creationId xmlns="" xmlns:a16="http://schemas.microsoft.com/office/drawing/2014/main" id="{8A65C02F-DE05-4D3A-A71A-9DE0584F47E2}"/>
               </a:ext>
             </a:extLst>
           </p:cNvPr>
@@ -10526,8 +10572,8 @@
         </p:blipFill>
         <p:spPr bwMode="auto">
           <a:xfrm>
-            <a:off x="9694937" y="2732142"/>
-            <a:ext cx="366614" cy="299616"/>
+            <a:off x="9589773" y="2760253"/>
+            <a:ext cx="460564" cy="376396"/>
           </a:xfrm>
           <a:prstGeom prst="rect">
             <a:avLst/>
@@ -10549,7 +10595,7 @@
           <p:cNvPr id="18" name="Picture 19">
             <a:extLst>
               <a:ext uri="{FF2B5EF4-FFF2-40B4-BE49-F238E27FC236}">
-                <a16:creationId xmlns:a16="http://schemas.microsoft.com/office/drawing/2014/main" xmlns="" id="{A51AA4B7-4ED7-4766-85D7-32FBC05AE70F}"/>
+                <a16:creationId xmlns="" xmlns:a16="http://schemas.microsoft.com/office/drawing/2014/main" id="{A51AA4B7-4ED7-4766-85D7-32FBC05AE70F}"/>
               </a:ext>
             </a:extLst>
           </p:cNvPr>
@@ -10567,8 +10613,8 @@
         </p:blipFill>
         <p:spPr bwMode="auto">
           <a:xfrm>
-            <a:off x="10362879" y="2940522"/>
-            <a:ext cx="1175171" cy="387757"/>
+            <a:off x="10511559" y="2915777"/>
+            <a:ext cx="1476328" cy="487124"/>
           </a:xfrm>
           <a:prstGeom prst="rect">
             <a:avLst/>
@@ -10609,8 +10655,8 @@
         </p:blipFill>
         <p:spPr>
           <a:xfrm>
-            <a:off x="9678200" y="3468647"/>
-            <a:ext cx="871229" cy="355929"/>
+            <a:off x="9549941" y="3356540"/>
+            <a:ext cx="1094496" cy="447140"/>
           </a:xfrm>
           <a:prstGeom prst="rect">
             <a:avLst/>
@@ -10640,8 +10686,8 @@
         </p:blipFill>
         <p:spPr bwMode="auto">
           <a:xfrm>
-            <a:off x="9830001" y="4403597"/>
-            <a:ext cx="594159" cy="594159"/>
+            <a:off x="9462924" y="4352405"/>
+            <a:ext cx="746422" cy="746420"/>
           </a:xfrm>
           <a:prstGeom prst="rect">
             <a:avLst/>
@@ -10685,8 +10731,8 @@
         </p:blipFill>
         <p:spPr>
           <a:xfrm>
-            <a:off x="9581483" y="1985235"/>
-            <a:ext cx="927416" cy="349287"/>
+            <a:off x="9529153" y="1982044"/>
+            <a:ext cx="1165082" cy="438796"/>
           </a:xfrm>
           <a:prstGeom prst="rect">
             <a:avLst/>
@@ -10726,6 +10772,52 @@
                 <a:schemeClr val="bg1"/>
               </a:solidFill>
             </a:endParaRPr>
+          </a:p>
+        </p:txBody>
+      </p:sp>
+      <p:sp>
+        <p:nvSpPr>
+          <p:cNvPr id="14" name="직사각형 13"/>
+          <p:cNvSpPr/>
+          <p:nvPr/>
+        </p:nvSpPr>
+        <p:spPr>
+          <a:xfrm>
+            <a:off x="9335192" y="1820487"/>
+            <a:ext cx="2709950" cy="3341717"/>
+          </a:xfrm>
+          <a:prstGeom prst="rect">
+            <a:avLst/>
+          </a:prstGeom>
+          <a:noFill/>
+          <a:ln>
+            <a:solidFill>
+              <a:schemeClr val="tx1"/>
+            </a:solidFill>
+          </a:ln>
+        </p:spPr>
+        <p:style>
+          <a:lnRef idx="2">
+            <a:schemeClr val="accent1">
+              <a:shade val="50000"/>
+            </a:schemeClr>
+          </a:lnRef>
+          <a:fillRef idx="1">
+            <a:schemeClr val="accent1"/>
+          </a:fillRef>
+          <a:effectRef idx="0">
+            <a:schemeClr val="accent1"/>
+          </a:effectRef>
+          <a:fontRef idx="minor">
+            <a:schemeClr val="lt1"/>
+          </a:fontRef>
+        </p:style>
+        <p:txBody>
+          <a:bodyPr rtlCol="0" anchor="ctr"/>
+          <a:lstStyle/>
+          <a:p>
+            <a:pPr algn="ctr"/>
+            <a:endParaRPr lang="ko-KR" altLang="en-US"/>
           </a:p>
         </p:txBody>
       </p:sp>
@@ -10824,28 +10916,28 @@
                 <a:gridCol w="2072939">
                   <a:extLst>
                     <a:ext uri="{9D8B030D-6E8A-4147-A177-3AD203B41FA5}">
-                      <a16:colId xmlns:a16="http://schemas.microsoft.com/office/drawing/2014/main" xmlns="" val="20000"/>
+                      <a16:colId xmlns="" xmlns:a16="http://schemas.microsoft.com/office/drawing/2014/main" val="20000"/>
                     </a:ext>
                   </a:extLst>
                 </a:gridCol>
                 <a:gridCol w="2381250">
                   <a:extLst>
                     <a:ext uri="{9D8B030D-6E8A-4147-A177-3AD203B41FA5}">
-                      <a16:colId xmlns:a16="http://schemas.microsoft.com/office/drawing/2014/main" xmlns="" val="20001"/>
+                      <a16:colId xmlns="" xmlns:a16="http://schemas.microsoft.com/office/drawing/2014/main" val="20001"/>
                     </a:ext>
                   </a:extLst>
                 </a:gridCol>
                 <a:gridCol w="1000125">
                   <a:extLst>
                     <a:ext uri="{9D8B030D-6E8A-4147-A177-3AD203B41FA5}">
-                      <a16:colId xmlns:a16="http://schemas.microsoft.com/office/drawing/2014/main" xmlns="" val="20002"/>
+                      <a16:colId xmlns="" xmlns:a16="http://schemas.microsoft.com/office/drawing/2014/main" val="20002"/>
                     </a:ext>
                   </a:extLst>
                 </a:gridCol>
                 <a:gridCol w="2673686">
                   <a:extLst>
                     <a:ext uri="{9D8B030D-6E8A-4147-A177-3AD203B41FA5}">
-                      <a16:colId xmlns:a16="http://schemas.microsoft.com/office/drawing/2014/main" xmlns="" val="20003"/>
+                      <a16:colId xmlns="" xmlns:a16="http://schemas.microsoft.com/office/drawing/2014/main" val="20003"/>
                     </a:ext>
                   </a:extLst>
                 </a:gridCol>
@@ -11067,7 +11159,7 @@
                 </a:tc>
                 <a:extLst>
                   <a:ext uri="{0D108BD9-81ED-4DB2-BD59-A6C34878D82A}">
-                    <a16:rowId xmlns:a16="http://schemas.microsoft.com/office/drawing/2014/main" xmlns="" val="10000"/>
+                    <a16:rowId xmlns="" xmlns:a16="http://schemas.microsoft.com/office/drawing/2014/main" val="10000"/>
                   </a:ext>
                 </a:extLst>
               </a:tr>
@@ -11419,7 +11511,7 @@
                 </a:tc>
                 <a:extLst>
                   <a:ext uri="{0D108BD9-81ED-4DB2-BD59-A6C34878D82A}">
-                    <a16:rowId xmlns:a16="http://schemas.microsoft.com/office/drawing/2014/main" xmlns="" val="10001"/>
+                    <a16:rowId xmlns="" xmlns:a16="http://schemas.microsoft.com/office/drawing/2014/main" val="10001"/>
                   </a:ext>
                 </a:extLst>
               </a:tr>
@@ -11783,7 +11875,7 @@
                 </a:tc>
                 <a:extLst>
                   <a:ext uri="{0D108BD9-81ED-4DB2-BD59-A6C34878D82A}">
-                    <a16:rowId xmlns:a16="http://schemas.microsoft.com/office/drawing/2014/main" xmlns="" val="10002"/>
+                    <a16:rowId xmlns="" xmlns:a16="http://schemas.microsoft.com/office/drawing/2014/main" val="10002"/>
                   </a:ext>
                 </a:extLst>
               </a:tr>
@@ -12197,7 +12289,7 @@
                 </a:tc>
                 <a:extLst>
                   <a:ext uri="{0D108BD9-81ED-4DB2-BD59-A6C34878D82A}">
-                    <a16:rowId xmlns:a16="http://schemas.microsoft.com/office/drawing/2014/main" xmlns="" val="10003"/>
+                    <a16:rowId xmlns="" xmlns:a16="http://schemas.microsoft.com/office/drawing/2014/main" val="10003"/>
                   </a:ext>
                 </a:extLst>
               </a:tr>
@@ -12549,7 +12641,7 @@
                 </a:tc>
                 <a:extLst>
                   <a:ext uri="{0D108BD9-81ED-4DB2-BD59-A6C34878D82A}">
-                    <a16:rowId xmlns:a16="http://schemas.microsoft.com/office/drawing/2014/main" xmlns="" val="10004"/>
+                    <a16:rowId xmlns="" xmlns:a16="http://schemas.microsoft.com/office/drawing/2014/main" val="10004"/>
                   </a:ext>
                 </a:extLst>
               </a:tr>
@@ -12913,7 +13005,7 @@
                 </a:tc>
                 <a:extLst>
                   <a:ext uri="{0D108BD9-81ED-4DB2-BD59-A6C34878D82A}">
-                    <a16:rowId xmlns:a16="http://schemas.microsoft.com/office/drawing/2014/main" xmlns="" val="10005"/>
+                    <a16:rowId xmlns="" xmlns:a16="http://schemas.microsoft.com/office/drawing/2014/main" val="10005"/>
                   </a:ext>
                 </a:extLst>
               </a:tr>
@@ -13265,7 +13357,7 @@
                 </a:tc>
                 <a:extLst>
                   <a:ext uri="{0D108BD9-81ED-4DB2-BD59-A6C34878D82A}">
-                    <a16:rowId xmlns:a16="http://schemas.microsoft.com/office/drawing/2014/main" xmlns="" val="10006"/>
+                    <a16:rowId xmlns="" xmlns:a16="http://schemas.microsoft.com/office/drawing/2014/main" val="10006"/>
                   </a:ext>
                 </a:extLst>
               </a:tr>
@@ -13617,7 +13709,7 @@
                 </a:tc>
                 <a:extLst>
                   <a:ext uri="{0D108BD9-81ED-4DB2-BD59-A6C34878D82A}">
-                    <a16:rowId xmlns:a16="http://schemas.microsoft.com/office/drawing/2014/main" xmlns="" val="10007"/>
+                    <a16:rowId xmlns="" xmlns:a16="http://schemas.microsoft.com/office/drawing/2014/main" val="10007"/>
                   </a:ext>
                 </a:extLst>
               </a:tr>
@@ -14031,7 +14123,7 @@
                 </a:tc>
                 <a:extLst>
                   <a:ext uri="{0D108BD9-81ED-4DB2-BD59-A6C34878D82A}">
-                    <a16:rowId xmlns:a16="http://schemas.microsoft.com/office/drawing/2014/main" xmlns="" val="10008"/>
+                    <a16:rowId xmlns="" xmlns:a16="http://schemas.microsoft.com/office/drawing/2014/main" val="10008"/>
                   </a:ext>
                 </a:extLst>
               </a:tr>
@@ -14383,7 +14475,7 @@
                 </a:tc>
                 <a:extLst>
                   <a:ext uri="{0D108BD9-81ED-4DB2-BD59-A6C34878D82A}">
-                    <a16:rowId xmlns:a16="http://schemas.microsoft.com/office/drawing/2014/main" xmlns="" val="10009"/>
+                    <a16:rowId xmlns="" xmlns:a16="http://schemas.microsoft.com/office/drawing/2014/main" val="10009"/>
                   </a:ext>
                 </a:extLst>
               </a:tr>
@@ -14735,7 +14827,7 @@
                 </a:tc>
                 <a:extLst>
                   <a:ext uri="{0D108BD9-81ED-4DB2-BD59-A6C34878D82A}">
-                    <a16:rowId xmlns:a16="http://schemas.microsoft.com/office/drawing/2014/main" xmlns="" val="10010"/>
+                    <a16:rowId xmlns="" xmlns:a16="http://schemas.microsoft.com/office/drawing/2014/main" val="10010"/>
                   </a:ext>
                 </a:extLst>
               </a:tr>
@@ -15087,7 +15179,7 @@
                 </a:tc>
                 <a:extLst>
                   <a:ext uri="{0D108BD9-81ED-4DB2-BD59-A6C34878D82A}">
-                    <a16:rowId xmlns:a16="http://schemas.microsoft.com/office/drawing/2014/main" xmlns="" val="10011"/>
+                    <a16:rowId xmlns="" xmlns:a16="http://schemas.microsoft.com/office/drawing/2014/main" val="10011"/>
                   </a:ext>
                 </a:extLst>
               </a:tr>
@@ -15439,7 +15531,7 @@
                 </a:tc>
                 <a:extLst>
                   <a:ext uri="{0D108BD9-81ED-4DB2-BD59-A6C34878D82A}">
-                    <a16:rowId xmlns:a16="http://schemas.microsoft.com/office/drawing/2014/main" xmlns="" val="1913449048"/>
+                    <a16:rowId xmlns="" xmlns:a16="http://schemas.microsoft.com/office/drawing/2014/main" val="1913449048"/>
                   </a:ext>
                 </a:extLst>
               </a:tr>
@@ -15791,7 +15883,7 @@
                 </a:tc>
                 <a:extLst>
                   <a:ext uri="{0D108BD9-81ED-4DB2-BD59-A6C34878D82A}">
-                    <a16:rowId xmlns:a16="http://schemas.microsoft.com/office/drawing/2014/main" xmlns="" val="3907166578"/>
+                    <a16:rowId xmlns="" xmlns:a16="http://schemas.microsoft.com/office/drawing/2014/main" val="3907166578"/>
                   </a:ext>
                 </a:extLst>
               </a:tr>
@@ -16143,7 +16235,7 @@
                 </a:tc>
                 <a:extLst>
                   <a:ext uri="{0D108BD9-81ED-4DB2-BD59-A6C34878D82A}">
-                    <a16:rowId xmlns:a16="http://schemas.microsoft.com/office/drawing/2014/main" xmlns="" val="1522583133"/>
+                    <a16:rowId xmlns="" xmlns:a16="http://schemas.microsoft.com/office/drawing/2014/main" val="1522583133"/>
                   </a:ext>
                 </a:extLst>
               </a:tr>
@@ -16507,7 +16599,7 @@
                 </a:tc>
                 <a:extLst>
                   <a:ext uri="{0D108BD9-81ED-4DB2-BD59-A6C34878D82A}">
-                    <a16:rowId xmlns:a16="http://schemas.microsoft.com/office/drawing/2014/main" xmlns="" val="1376781956"/>
+                    <a16:rowId xmlns="" xmlns:a16="http://schemas.microsoft.com/office/drawing/2014/main" val="1376781956"/>
                   </a:ext>
                 </a:extLst>
               </a:tr>
@@ -16520,7 +16612,7 @@
           <p:cNvPr id="15" name="그림 14">
             <a:extLst>
               <a:ext uri="{FF2B5EF4-FFF2-40B4-BE49-F238E27FC236}">
-                <a16:creationId xmlns:a16="http://schemas.microsoft.com/office/drawing/2014/main" xmlns="" id="{0D30D4A2-F239-4902-A93F-E539F2144DE8}"/>
+                <a16:creationId xmlns="" xmlns:a16="http://schemas.microsoft.com/office/drawing/2014/main" id="{0D30D4A2-F239-4902-A93F-E539F2144DE8}"/>
               </a:ext>
             </a:extLst>
           </p:cNvPr>
@@ -16537,7 +16629,7 @@
         </p:blipFill>
         <p:spPr>
           <a:xfrm>
-            <a:off x="10670000" y="4704962"/>
+            <a:off x="10686625" y="4788089"/>
             <a:ext cx="1232922" cy="337787"/>
           </a:xfrm>
           <a:prstGeom prst="rect">
@@ -16550,7 +16642,7 @@
           <p:cNvPr id="21" name="그림 20">
             <a:extLst>
               <a:ext uri="{FF2B5EF4-FFF2-40B4-BE49-F238E27FC236}">
-                <a16:creationId xmlns:a16="http://schemas.microsoft.com/office/drawing/2014/main" xmlns="" id="{7BE99C68-3F01-4EA9-980F-087F635FA392}"/>
+                <a16:creationId xmlns="" xmlns:a16="http://schemas.microsoft.com/office/drawing/2014/main" id="{7BE99C68-3F01-4EA9-980F-087F635FA392}"/>
               </a:ext>
             </a:extLst>
           </p:cNvPr>
@@ -16573,7 +16665,7 @@
         </p:blipFill>
         <p:spPr>
           <a:xfrm>
-            <a:off x="9342238" y="4172989"/>
+            <a:off x="9408740" y="4156363"/>
             <a:ext cx="1089377" cy="337970"/>
           </a:xfrm>
           <a:prstGeom prst="rect">
@@ -16586,7 +16678,7 @@
           <p:cNvPr id="22" name="그림 21">
             <a:extLst>
               <a:ext uri="{FF2B5EF4-FFF2-40B4-BE49-F238E27FC236}">
-                <a16:creationId xmlns:a16="http://schemas.microsoft.com/office/drawing/2014/main" xmlns="" id="{65836530-8145-479C-98AD-B53AA83E8E41}"/>
+                <a16:creationId xmlns="" xmlns:a16="http://schemas.microsoft.com/office/drawing/2014/main" id="{65836530-8145-479C-98AD-B53AA83E8E41}"/>
               </a:ext>
             </a:extLst>
           </p:cNvPr>
@@ -16603,7 +16695,7 @@
         </p:blipFill>
         <p:spPr>
           <a:xfrm>
-            <a:off x="9256616" y="4711016"/>
+            <a:off x="9348056" y="4686078"/>
             <a:ext cx="1084417" cy="341502"/>
           </a:xfrm>
           <a:prstGeom prst="rect">
@@ -16616,7 +16708,7 @@
           <p:cNvPr id="23" name="그림 22">
             <a:extLst>
               <a:ext uri="{FF2B5EF4-FFF2-40B4-BE49-F238E27FC236}">
-                <a16:creationId xmlns:a16="http://schemas.microsoft.com/office/drawing/2014/main" xmlns="" id="{8619A116-A858-4B41-A8C7-96A7329E8EE8}"/>
+                <a16:creationId xmlns="" xmlns:a16="http://schemas.microsoft.com/office/drawing/2014/main" id="{8619A116-A858-4B41-A8C7-96A7329E8EE8}"/>
               </a:ext>
             </a:extLst>
           </p:cNvPr>
@@ -16633,7 +16725,7 @@
         </p:blipFill>
         <p:spPr>
           <a:xfrm>
-            <a:off x="10429268" y="3733340"/>
+            <a:off x="10371079" y="3833093"/>
             <a:ext cx="1621416" cy="311811"/>
           </a:xfrm>
           <a:prstGeom prst="rect">
@@ -16657,8 +16749,8 @@
         </p:blipFill>
         <p:spPr>
           <a:xfrm>
-            <a:off x="10854791" y="2391028"/>
-            <a:ext cx="1027986" cy="298243"/>
+            <a:off x="10715503" y="2298587"/>
+            <a:ext cx="1206810" cy="350122"/>
           </a:xfrm>
           <a:prstGeom prst="rect">
             <a:avLst/>
@@ -16670,7 +16762,7 @@
           <p:cNvPr id="25" name="그림 24">
             <a:extLst>
               <a:ext uri="{FF2B5EF4-FFF2-40B4-BE49-F238E27FC236}">
-                <a16:creationId xmlns:a16="http://schemas.microsoft.com/office/drawing/2014/main" xmlns="" id="{6387FAFA-4C74-4A02-A36C-B49A9C32BD9E}"/>
+                <a16:creationId xmlns="" xmlns:a16="http://schemas.microsoft.com/office/drawing/2014/main" id="{6387FAFA-4C74-4A02-A36C-B49A9C32BD9E}"/>
               </a:ext>
             </a:extLst>
           </p:cNvPr>
@@ -16687,7 +16779,7 @@
         </p:blipFill>
         <p:spPr>
           <a:xfrm>
-            <a:off x="9304851" y="3649289"/>
+            <a:off x="9387978" y="3582787"/>
             <a:ext cx="881316" cy="306580"/>
           </a:xfrm>
           <a:prstGeom prst="rect">
@@ -16700,7 +16792,7 @@
           <p:cNvPr id="26" name="그림 25">
             <a:extLst>
               <a:ext uri="{FF2B5EF4-FFF2-40B4-BE49-F238E27FC236}">
-                <a16:creationId xmlns:a16="http://schemas.microsoft.com/office/drawing/2014/main" xmlns="" id="{D0094439-CFE5-4EB8-B3CB-2C034A1B547B}"/>
+                <a16:creationId xmlns="" xmlns:a16="http://schemas.microsoft.com/office/drawing/2014/main" id="{D0094439-CFE5-4EB8-B3CB-2C034A1B547B}"/>
               </a:ext>
             </a:extLst>
           </p:cNvPr>
@@ -16717,8 +16809,8 @@
         </p:blipFill>
         <p:spPr>
           <a:xfrm>
-            <a:off x="10274062" y="2701636"/>
-            <a:ext cx="1170249" cy="423539"/>
+            <a:off x="9922894" y="2606609"/>
+            <a:ext cx="1373822" cy="497214"/>
           </a:xfrm>
           <a:prstGeom prst="rect">
             <a:avLst/>
@@ -16730,7 +16822,7 @@
           <p:cNvPr id="27" name="그림 26">
             <a:extLst>
               <a:ext uri="{FF2B5EF4-FFF2-40B4-BE49-F238E27FC236}">
-                <a16:creationId xmlns:a16="http://schemas.microsoft.com/office/drawing/2014/main" xmlns="" id="{266FEB56-7C66-45C3-B6B4-E7718EFD025B}"/>
+                <a16:creationId xmlns="" xmlns:a16="http://schemas.microsoft.com/office/drawing/2014/main" id="{266FEB56-7C66-45C3-B6B4-E7718EFD025B}"/>
               </a:ext>
             </a:extLst>
           </p:cNvPr>
@@ -16747,7 +16839,7 @@
         </p:blipFill>
         <p:spPr>
           <a:xfrm>
-            <a:off x="9218140" y="3092335"/>
+            <a:off x="9301267" y="3034146"/>
             <a:ext cx="1424712" cy="410975"/>
           </a:xfrm>
           <a:prstGeom prst="rect">
@@ -16771,7 +16863,7 @@
         </p:blipFill>
         <p:spPr>
           <a:xfrm>
-            <a:off x="10889673" y="4304711"/>
+            <a:off x="10897986" y="4387839"/>
             <a:ext cx="939590" cy="209490"/>
           </a:xfrm>
           <a:prstGeom prst="rect">
@@ -16795,7 +16887,7 @@
         </p:blipFill>
         <p:spPr>
           <a:xfrm>
-            <a:off x="10964019" y="3178521"/>
+            <a:off x="11055460" y="3186834"/>
             <a:ext cx="862805" cy="384691"/>
           </a:xfrm>
           <a:prstGeom prst="rect">
@@ -16819,8 +16911,8 @@
         </p:blipFill>
         <p:spPr>
           <a:xfrm>
-            <a:off x="9180779" y="2327564"/>
-            <a:ext cx="1197421" cy="389405"/>
+            <a:off x="9342637" y="1977812"/>
+            <a:ext cx="1405720" cy="457142"/>
           </a:xfrm>
           <a:prstGeom prst="rect">
             <a:avLst/>
@@ -16860,6 +16952,52 @@
                 <a:schemeClr val="bg1"/>
               </a:solidFill>
             </a:endParaRPr>
+          </a:p>
+        </p:txBody>
+      </p:sp>
+      <p:sp>
+        <p:nvSpPr>
+          <p:cNvPr id="16" name="직사각형 15"/>
+          <p:cNvSpPr/>
+          <p:nvPr/>
+        </p:nvSpPr>
+        <p:spPr>
+          <a:xfrm>
+            <a:off x="9285316" y="1911927"/>
+            <a:ext cx="2709950" cy="3341717"/>
+          </a:xfrm>
+          <a:prstGeom prst="rect">
+            <a:avLst/>
+          </a:prstGeom>
+          <a:noFill/>
+          <a:ln>
+            <a:solidFill>
+              <a:schemeClr val="tx1"/>
+            </a:solidFill>
+          </a:ln>
+        </p:spPr>
+        <p:style>
+          <a:lnRef idx="2">
+            <a:schemeClr val="accent1">
+              <a:shade val="50000"/>
+            </a:schemeClr>
+          </a:lnRef>
+          <a:fillRef idx="1">
+            <a:schemeClr val="accent1"/>
+          </a:fillRef>
+          <a:effectRef idx="0">
+            <a:schemeClr val="accent1"/>
+          </a:effectRef>
+          <a:fontRef idx="minor">
+            <a:schemeClr val="lt1"/>
+          </a:fontRef>
+        </p:style>
+        <p:txBody>
+          <a:bodyPr rtlCol="0" anchor="ctr"/>
+          <a:lstStyle/>
+          <a:p>
+            <a:pPr algn="ctr"/>
+            <a:endParaRPr lang="ko-KR" altLang="en-US"/>
           </a:p>
         </p:txBody>
       </p:sp>
